--- a/presentation/Who_needs_early_help.pptx
+++ b/presentation/Who_needs_early_help.pptx
@@ -932,52 +932,51 @@
           <a:lstStyle/>
           <a:p>
             <a:r>
-              <a:rPr lang="en-US"/>
-              <a:t>SPEAKER: Lucas</a:t>
-            </a:r>
-          </a:p>
-          <a:p>
-            <a:r>
-              <a:rPr lang="en-US"/>
+              <a:rPr lang="en-US" dirty="0"/>
+              <a:t>SPEAKER: Minhyeok</a:t>
+            </a:r>
+          </a:p>
+          <a:p>
+            <a:r>
+              <a:rPr lang="en-US" dirty="0"/>
               <a:t>TARGET TIME: 0:40 (running total 8:00)</a:t>
             </a:r>
           </a:p>
           <a:p>
-            <a:endParaRPr lang="en-US"/>
-          </a:p>
-          <a:p>
-            <a:r>
-              <a:rPr lang="en-US"/>
+            <a:endParaRPr lang="en-US" dirty="0"/>
+          </a:p>
+          <a:p>
+            <a:r>
+              <a:rPr lang="en-US" dirty="0"/>
               <a:t>Three risks, from the side of the job seeker.</a:t>
             </a:r>
           </a:p>
           <a:p>
-            <a:endParaRPr lang="en-US"/>
-          </a:p>
-          <a:p>
-            <a:r>
-              <a:rPr lang="en-US"/>
+            <a:endParaRPr lang="en-US" dirty="0"/>
+          </a:p>
+          <a:p>
+            <a:r>
+              <a:rPr lang="en-US" dirty="0"/>
               <a:t>One: the model misses young people who get stuck. They wait until month seven. So our rule is that a score may only add help, and a coach can always invite someone.</a:t>
             </a:r>
           </a:p>
           <a:p>
-            <a:endParaRPr lang="en-US"/>
-          </a:p>
-          <a:p>
-            <a:r>
-              <a:rPr lang="en-US"/>
+            <a:endParaRPr lang="en-US" dirty="0"/>
+          </a:p>
+          <a:p>
+            <a:r>
+              <a:rPr lang="en-US" dirty="0"/>
               <a:t>Two: scoring people on where they were born. We left migration background out of the model. It did not make the model clearly better. By the same rule we took gender out: we tested it at the end, it did not improve the model, and it made the model invite women more often than men. We still check the results per group.</a:t>
             </a:r>
           </a:p>
           <a:p>
-            <a:endParaRPr lang="en-US"/>
-          </a:p>
-          <a:p>
-            <a:r>
-              <a:rPr lang="en-US"/>
+            <a:endParaRPr lang="en-US" dirty="0"/>
+          </a:p>
+          <a:p>
+            <a:r>
+              <a:rPr lang="en-US" dirty="0"/>
               <a:t>Three: health is private. So answering has to be voluntary, and declining can never lower your chance of an invitation.</a:t>
             </a:r>
-            <a:endParaRPr lang="en-US" dirty="0"/>
           </a:p>
         </p:txBody>
       </p:sp>
@@ -1062,28 +1061,27 @@
           <a:lstStyle/>
           <a:p>
             <a:r>
-              <a:rPr lang="en-US"/>
-              <a:t>SPEAKER: Lucas</a:t>
-            </a:r>
-          </a:p>
-          <a:p>
-            <a:r>
-              <a:rPr lang="en-US"/>
+              <a:rPr lang="en-US" dirty="0"/>
+              <a:t>SPEAKER: Minhyeok</a:t>
+            </a:r>
+          </a:p>
+          <a:p>
+            <a:r>
+              <a:rPr lang="en-US" dirty="0"/>
               <a:t>TARGET TIME: 0:20 (running total 8:20)</a:t>
             </a:r>
           </a:p>
           <a:p>
             <a:r>
-              <a:rPr lang="en-US"/>
+              <a:rPr lang="en-US" dirty="0"/>
               <a:t>So, our three questions. Can it be accurate? Barely better than an age rule. Is it fair? No, it misses young people most. Should it be used? Not as it is: a score like this may only add help.</a:t>
             </a:r>
           </a:p>
           <a:p>
             <a:r>
-              <a:rPr lang="en-US"/>
+              <a:rPr lang="en-US" dirty="0"/>
               <a:t>Thank you. Are there any questions?</a:t>
             </a:r>
-            <a:endParaRPr lang="en-US" dirty="0"/>
           </a:p>
         </p:txBody>
       </p:sp>
@@ -1325,43 +1323,42 @@
           <a:lstStyle/>
           <a:p>
             <a:r>
-              <a:rPr lang="en-US"/>
-              <a:t>SPEAKER: Lucas</a:t>
-            </a:r>
-          </a:p>
-          <a:p>
-            <a:r>
-              <a:rPr lang="en-US"/>
+              <a:rPr lang="en-US" dirty="0"/>
+              <a:t>SPEAKER: Minhyeok</a:t>
+            </a:r>
+          </a:p>
+          <a:p>
+            <a:r>
+              <a:rPr lang="en-US" dirty="0"/>
               <a:t>TARGET TIME: 0:25 (running total 1:50)</a:t>
             </a:r>
           </a:p>
           <a:p>
-            <a:endParaRPr lang="en-US"/>
-          </a:p>
-          <a:p>
-            <a:r>
-              <a:rPr lang="en-US"/>
+            <a:endParaRPr lang="en-US" dirty="0"/>
+          </a:p>
+          <a:p>
+            <a:r>
+              <a:rPr lang="en-US" dirty="0"/>
               <a:t>This is SDG 8, target 8.5: full employment and decent work for all, including young people and people with disabilities.</a:t>
             </a:r>
           </a:p>
           <a:p>
-            <a:endParaRPr lang="en-US"/>
-          </a:p>
-          <a:p>
-            <a:r>
-              <a:rPr lang="en-US"/>
+            <a:endParaRPr lang="en-US" dirty="0"/>
+          </a:p>
+          <a:p>
+            <a:r>
+              <a:rPr lang="en-US" dirty="0"/>
               <a:t>We fit in two ways. The model is about getting people back into work: who needs help first. And "for all" is why we check the model per group, to see who it misses. The people who benefit are job seekers who would otherwise be seen too late.</a:t>
             </a:r>
           </a:p>
           <a:p>
-            <a:endParaRPr lang="en-US"/>
-          </a:p>
-          <a:p>
-            <a:r>
-              <a:rPr lang="en-US"/>
+            <a:endParaRPr lang="en-US" dirty="0"/>
+          </a:p>
+          <a:p>
+            <a:r>
+              <a:rPr lang="en-US" dirty="0"/>
               <a:t>IF ASKED what it does not do: it creates no jobs and no extra coach time. It only helps decide who is seen first.</a:t>
             </a:r>
-            <a:endParaRPr lang="en-US" dirty="0"/>
           </a:p>
         </p:txBody>
       </p:sp>
@@ -1446,52 +1443,51 @@
           <a:lstStyle/>
           <a:p>
             <a:r>
-              <a:rPr lang="en-US"/>
+              <a:rPr lang="en-US" dirty="0"/>
               <a:t>SPEAKER: Minhyeok</a:t>
             </a:r>
           </a:p>
           <a:p>
             <a:r>
-              <a:rPr lang="en-US"/>
+              <a:rPr lang="en-US" dirty="0"/>
               <a:t>TARGET TIME: 0:45 (running total 2:35)</a:t>
             </a:r>
           </a:p>
           <a:p>
-            <a:endParaRPr lang="en-US"/>
-          </a:p>
-          <a:p>
-            <a:r>
-              <a:rPr lang="en-US"/>
+            <a:endParaRPr lang="en-US" dirty="0"/>
+          </a:p>
+          <a:p>
+            <a:r>
+              <a:rPr lang="en-US" dirty="0"/>
               <a:t>Our user is the UWV work coach who handles new WW claimants. Coaches do not follow the score blindly. About three in ten high scorers are invited earlier, because the coach thinks their chances are worse than the score says. So a coach needs a score they can explain, and can disagree with.</a:t>
             </a:r>
           </a:p>
           <a:p>
-            <a:endParaRPr lang="en-US"/>
-          </a:p>
-          <a:p>
-            <a:r>
-              <a:rPr lang="en-US"/>
+            <a:endParaRPr lang="en-US" dirty="0"/>
+          </a:p>
+          <a:p>
+            <a:r>
+              <a:rPr lang="en-US" dirty="0"/>
               <a:t>The model is about people aged 18 to 66 who just lost their job. In our data 25 percent of the youngest group is still without work after a year, and 53 percent of the oldest.</a:t>
             </a:r>
           </a:p>
           <a:p>
-            <a:endParaRPr lang="en-US"/>
-          </a:p>
-          <a:p>
-            <a:r>
-              <a:rPr lang="en-US"/>
+            <a:endParaRPr lang="en-US" dirty="0"/>
+          </a:p>
+          <a:p>
+            <a:r>
+              <a:rPr lang="en-US" dirty="0"/>
               <a:t>It is not for employers, not for fraud teams and not for municipalities. And people who do not read Dutch well are hardly in our data.</a:t>
             </a:r>
           </a:p>
           <a:p>
-            <a:endParaRPr lang="en-US"/>
-          </a:p>
-          <a:p>
-            <a:r>
-              <a:rPr lang="en-US"/>
+            <a:endParaRPr lang="en-US" dirty="0"/>
+          </a:p>
+          <a:p>
+            <a:r>
+              <a:rPr lang="en-US" dirty="0"/>
               <a:t>IF ASKED about the numbers on the left: in the year UWV studied, 179,840 people started a benefit. More than 90 percent of the low scorers get a conversation, against 52 percent of the high scorers.</a:t>
             </a:r>
-            <a:endParaRPr lang="en-US" dirty="0"/>
           </a:p>
         </p:txBody>
       </p:sp>
@@ -1585,8 +1581,7 @@
 The input is what is known at intake. The output is a probability and an advice.
 IF A TEACHER ASKS HOW WE USED SCIKIT-LEARN:
 Everything after loading the data is scikit-learn. StratifiedGroupKFold makes the test split and the folds, so one person never ends up on both sides. The Pipeline with a ColumnTransformer learns imputing, scaling and encoding from training data only. GridSearchCV tunes all three models on the same folds and the same metric, which makes the comparison fair. DummyClassifier gives the baseline, cross_val_predict gives the probabilities for the threshold, and sklearn.metrics gives the confusion matrices and scores.
-IF A TEACHER ASKS ABOUT AI ASSISTANTS:
-[Fill in ourselves: which assistant we used and for what. The README and the notebook do not say, so this is not written for us.] The assignment rule we follow: every choice in the notebook is ours, and we can explain every line.</a:t>
+</a:t>
             </a:r>
           </a:p>
         </p:txBody>
@@ -1766,52 +1761,51 @@
           <a:lstStyle/>
           <a:p>
             <a:r>
-              <a:rPr lang="en-US"/>
+              <a:rPr lang="en-US" dirty="0"/>
               <a:t>SPEAKER: Lucas</a:t>
             </a:r>
           </a:p>
           <a:p>
             <a:r>
-              <a:rPr lang="en-US"/>
+              <a:rPr lang="en-US" dirty="0"/>
               <a:t>TARGET TIME: 0:50 (running total 5:25)</a:t>
             </a:r>
           </a:p>
           <a:p>
-            <a:endParaRPr lang="en-US"/>
-          </a:p>
-          <a:p>
-            <a:r>
-              <a:rPr lang="en-US"/>
+            <a:endParaRPr lang="en-US" dirty="0"/>
+          </a:p>
+          <a:p>
+            <a:r>
+              <a:rPr lang="en-US" dirty="0"/>
               <a:t>This is the confusion matrix of the logistic regression on the 405 test cases. 155 people were correctly predicted to be back in work. 100 were correctly predicted to be long-term unemployed. 92 are extra invites: they get a conversation they did not need. 58 are missed. They wait until month seven, and that is the worse mistake.</a:t>
             </a:r>
           </a:p>
           <a:p>
-            <a:endParaRPr lang="en-US"/>
-          </a:p>
-          <a:p>
-            <a:r>
-              <a:rPr lang="en-US"/>
+            <a:endParaRPr lang="en-US" dirty="0"/>
+          </a:p>
+          <a:p>
+            <a:r>
+              <a:rPr lang="en-US" dirty="0"/>
               <a:t>Who are those 58? Mostly young people. Of the long-term unemployed aged 50 to 66 the model finds 89 percent. Of those aged 18 to 29 it finds 18 percent on the test set, and only 12 percent in cross-validation. The gap shows up both times, so we trust it.</a:t>
             </a:r>
           </a:p>
           <a:p>
-            <a:endParaRPr lang="en-US"/>
-          </a:p>
-          <a:p>
-            <a:r>
-              <a:rPr lang="en-US"/>
-              <a:t>Now Minhyeok runs one live prediction.</a:t>
-            </a:r>
-          </a:p>
-          <a:p>
-            <a:endParaRPr lang="en-US"/>
-          </a:p>
-          <a:p>
-            <a:r>
-              <a:rPr lang="en-US"/>
+            <a:endParaRPr lang="en-US" dirty="0"/>
+          </a:p>
+          <a:p>
+            <a:r>
+              <a:rPr lang="en-US" dirty="0"/>
+              <a:t>Now Lucas runs one live prediction.</a:t>
+            </a:r>
+          </a:p>
+          <a:p>
+            <a:endParaRPr lang="en-US" dirty="0"/>
+          </a:p>
+          <a:p>
+            <a:r>
+              <a:rPr lang="en-US" dirty="0"/>
               <a:t>IF ASKED about men and women: recall was 0.57 and 0.70 on the test set, but 0.60 for both on more data, so that gap is chance. Gender is not a feature in the model.</a:t>
             </a:r>
-            <a:endParaRPr lang="en-US" dirty="0"/>
           </a:p>
         </p:txBody>
       </p:sp>
@@ -1896,82 +1890,81 @@
           <a:lstStyle/>
           <a:p>
             <a:r>
-              <a:rPr lang="en-US"/>
-              <a:t>SPEAKER: Minhyeok</a:t>
-            </a:r>
-          </a:p>
-          <a:p>
-            <a:r>
-              <a:rPr lang="en-US"/>
+              <a:rPr lang="en-US" dirty="0"/>
+              <a:t>SPEAKER: Lucas</a:t>
+            </a:r>
+          </a:p>
+          <a:p>
+            <a:r>
+              <a:rPr lang="en-US" dirty="0"/>
               <a:t>TARGET TIME: 1:10 (running total 6:35)</a:t>
             </a:r>
           </a:p>
           <a:p>
-            <a:endParaRPr lang="en-US"/>
-          </a:p>
-          <a:p>
-            <a:r>
-              <a:rPr lang="en-US"/>
+            <a:endParaRPr lang="en-US" dirty="0"/>
+          </a:p>
+          <a:p>
+            <a:r>
+              <a:rPr lang="en-US" dirty="0"/>
               <a:t>BEFORE WE START: notebook open, run up to step 9, cursor on the step 10 cell.</a:t>
             </a:r>
           </a:p>
           <a:p>
-            <a:endParaRPr lang="en-US"/>
-          </a:p>
-          <a:p>
-            <a:r>
-              <a:rPr lang="en-US"/>
+            <a:endParaRPr lang="en-US" dirty="0"/>
+          </a:p>
+          <a:p>
+            <a:r>
+              <a:rPr lang="en-US" dirty="0"/>
               <a:t>(Switch to the notebook, step 10.)</a:t>
             </a:r>
           </a:p>
           <a:p>
             <a:r>
-              <a:rPr lang="en-US"/>
+              <a:rPr lang="en-US" dirty="0"/>
               <a:t>This job seeker is made up, she is not a person from the data. She is 58, lives alone, worked twelve years in retail on a temporary contract, and has a long-standing disease.</a:t>
             </a:r>
           </a:p>
           <a:p>
-            <a:endParaRPr lang="en-US"/>
-          </a:p>
-          <a:p>
-            <a:r>
-              <a:rPr lang="en-US"/>
+            <a:endParaRPr lang="en-US" dirty="0"/>
+          </a:p>
+          <a:p>
+            <a:r>
+              <a:rPr lang="en-US" dirty="0"/>
               <a:t>I run the cell. The model gives a probability of 78 percent that she is still without work after a year. So the advice is to invite her early.</a:t>
             </a:r>
           </a:p>
           <a:p>
-            <a:endParaRPr lang="en-US"/>
-          </a:p>
-          <a:p>
-            <a:r>
-              <a:rPr lang="en-US"/>
+            <a:endParaRPr lang="en-US" dirty="0"/>
+          </a:p>
+          <a:p>
+            <a:r>
+              <a:rPr lang="en-US" dirty="0"/>
               <a:t>The last two lines are the reason we chose this model. Her age and her twelve years with the same employer raise the score most. A coach can check these reasons in the conversation, and disagree with the score.</a:t>
             </a:r>
           </a:p>
           <a:p>
-            <a:endParaRPr lang="en-US"/>
-          </a:p>
-          <a:p>
-            <a:r>
-              <a:rPr lang="en-US"/>
+            <a:endParaRPr lang="en-US" dirty="0"/>
+          </a:p>
+          <a:p>
+            <a:r>
+              <a:rPr lang="en-US" dirty="0"/>
               <a:t>(If the notebook does not run: the saved output is on the slide. Then back to the slides.)</a:t>
             </a:r>
           </a:p>
           <a:p>
-            <a:endParaRPr lang="en-US"/>
-          </a:p>
-          <a:p>
-            <a:r>
-              <a:rPr lang="en-US"/>
+            <a:endParaRPr lang="en-US" dirty="0"/>
+          </a:p>
+          <a:p>
+            <a:r>
+              <a:rPr lang="en-US" dirty="0"/>
               <a:t>MOST LIKELY QUESTION: Why is the threshold 0.35 in the live prediction and 0.5 in the matrix?</a:t>
             </a:r>
           </a:p>
           <a:p>
             <a:r>
-              <a:rPr lang="en-US"/>
+              <a:rPr lang="en-US" dirty="0"/>
               <a:t>ANSWER: 0.5 is the default and what the comparison table uses. We advise 0.35 if UWV can see about three in four people early: it finds 86 percent of the long-term cases instead of 63, but it invites 77 percent of everyone instead of 47.</a:t>
             </a:r>
-            <a:endParaRPr lang="en-US" dirty="0"/>
           </a:p>
         </p:txBody>
       </p:sp>
@@ -2524,7 +2517,7 @@
           </a:prstGeom>
           <a:extLst>
             <a:ext uri="{C572A759-6A51-4108-AA02-DFA0A04FC94B}">
-              <ma14:wrappingTextBoxFlag xmlns="" xmlns:ma14="http://schemas.microsoft.com/office/mac/drawingml/2011/main" val="0"/>
+              <ma14:wrappingTextBoxFlag xmlns:ma14="http://schemas.microsoft.com/office/mac/drawingml/2011/main" xmlns="" val="0"/>
             </a:ext>
           </a:extLst>
         </p:spPr>
@@ -2599,7 +2592,7 @@
           </a:prstGeom>
           <a:extLst>
             <a:ext uri="{C572A759-6A51-4108-AA02-DFA0A04FC94B}">
-              <ma14:wrappingTextBoxFlag xmlns="" xmlns:ma14="http://schemas.microsoft.com/office/mac/drawingml/2011/main" val="0"/>
+              <ma14:wrappingTextBoxFlag xmlns:ma14="http://schemas.microsoft.com/office/mac/drawingml/2011/main" xmlns="" val="0"/>
             </a:ext>
           </a:extLst>
         </p:spPr>
@@ -3109,7 +3102,7 @@
               <a:buNone/>
             </a:pPr>
             <a:r>
-              <a:rPr lang="en-US" sz="1000" b="1" kern="0" spc="150" dirty="0">
+              <a:rPr lang="en-US" sz="1000" b="1" kern="0" spc="150">
                 <a:solidFill>
                   <a:schemeClr val="accent1"/>
                 </a:solidFill>
@@ -3117,7 +3110,7 @@
                 <a:ea typeface="Arial" pitchFamily="34" charset="-122"/>
                 <a:cs typeface="Arial" pitchFamily="34" charset="-120"/>
               </a:rPr>
-              <a:t>RUBRIC 6 · ETHICAL REASONING</a:t>
+              <a:t>ETHICAL REASONING</a:t>
             </a:r>
             <a:endParaRPr lang="en-US" sz="1000" dirty="0"/>
           </a:p>
@@ -3219,7 +3212,7 @@
         </p:nvGraphicFramePr>
         <p:xfrm>
           <a:off x="457200" y="1188720"/>
-          <a:ext cx="8229600" cy="2249424"/>
+          <a:ext cx="8229600" cy="3206496"/>
         </p:xfrm>
         <a:graphic>
           <a:graphicData uri="http://schemas.openxmlformats.org/drawingml/2006/table">
@@ -3855,7 +3848,7 @@
           </a:prstGeom>
           <a:extLst>
             <a:ext uri="{C572A759-6A51-4108-AA02-DFA0A04FC94B}">
-              <ma14:wrappingTextBoxFlag xmlns="" xmlns:ma14="http://schemas.microsoft.com/office/mac/drawingml/2011/main" val="0"/>
+              <ma14:wrappingTextBoxFlag xmlns:ma14="http://schemas.microsoft.com/office/mac/drawingml/2011/main" xmlns="" val="0"/>
             </a:ext>
           </a:extLst>
         </p:spPr>
@@ -3978,67 +3971,6 @@
               <a:t>Lucas Jansze  &amp;  Minhyeok Sung</a:t>
             </a:r>
             <a:endParaRPr lang="en-US" sz="1600" dirty="0"/>
-          </a:p>
-        </p:txBody>
-      </p:sp>
-      <p:sp>
-        <p:nvSpPr>
-          <p:cNvPr id="5" name="text 2"/>
-          <p:cNvSpPr txBox="1"/>
-          <p:nvPr/>
-        </p:nvSpPr>
-        <p:spPr>
-          <a:xfrm>
-            <a:off x="548640" y="4381500"/>
-            <a:ext cx="8046720" cy="274320"/>
-          </a:xfrm>
-          <a:prstGeom prst="rect">
-            <a:avLst/>
-          </a:prstGeom>
-          <a:noFill/>
-          <a:ln/>
-        </p:spPr>
-        <p:txBody>
-          <a:bodyPr wrap="square" lIns="0" tIns="0" rIns="0" bIns="0" rtlCol="0" anchor="t"/>
-          <a:lstStyle/>
-          <a:p>
-            <a:pPr marL="0" indent="0">
-              <a:buNone/>
-            </a:pPr>
-            <a:r>
-              <a:rPr lang="en-US" sz="1200">
-                <a:solidFill>
-                  <a:schemeClr val="accent2"/>
-                </a:solidFill>
-              </a:rPr>
-              <a:t>Notebook, README and ethics: github.com/lucasjansze/Hackathon_5</a:t>
-            </a:r>
-            <a:endParaRPr lang="en-US" sz="1200" dirty="0"/>
-          </a:p>
-        </p:txBody>
-      </p:sp>
-      <p:sp>
-        <p:nvSpPr>
-          <p:cNvPr id="7" name="Tijdelijke aanduiding voor tekst 6">
-            <a:extLst>
-              <a:ext uri="{FF2B5EF4-FFF2-40B4-BE49-F238E27FC236}">
-                <a16:creationId xmlns:a16="http://schemas.microsoft.com/office/drawing/2014/main" id="{A56F2A91-C2DE-24E7-4B90-541649E56617}"/>
-              </a:ext>
-            </a:extLst>
-          </p:cNvPr>
-          <p:cNvSpPr>
-            <a:spLocks noGrp="1"/>
-          </p:cNvSpPr>
-          <p:nvPr>
-            <p:ph type="body" idx="101"/>
-          </p:nvPr>
-        </p:nvSpPr>
-        <p:spPr/>
-        <p:txBody>
-          <a:bodyPr/>
-          <a:lstStyle/>
-          <a:p>
-            <a:endParaRPr lang="en-US"/>
           </a:p>
         </p:txBody>
       </p:sp>
@@ -4253,7 +4185,7 @@
                 <a:ea typeface="Arial" pitchFamily="34" charset="-122"/>
                 <a:cs typeface="Arial" pitchFamily="34" charset="-120"/>
               </a:rPr>
-              <a:t>RUBRIC 1 · PROBLEM DEFINITION</a:t>
+              <a:t>PROBLEM DEFINITION</a:t>
             </a:r>
             <a:endParaRPr lang="en-US" sz="1000" dirty="0"/>
           </a:p>
@@ -4359,7 +4291,7 @@
           </a:prstGeom>
           <a:extLst>
             <a:ext uri="{C572A759-6A51-4108-AA02-DFA0A04FC94B}">
-              <ma14:wrappingTextBoxFlag xmlns="" xmlns:ma14="http://schemas.microsoft.com/office/mac/drawingml/2011/main" val="0"/>
+              <ma14:wrappingTextBoxFlag xmlns:ma14="http://schemas.microsoft.com/office/mac/drawingml/2011/main" xmlns="" val="0"/>
             </a:ext>
           </a:extLst>
         </p:spPr>
@@ -5729,7 +5661,7 @@
                 <a:ea typeface="Arial" pitchFamily="34" charset="-122"/>
                 <a:cs typeface="Arial" pitchFamily="34" charset="-120"/>
               </a:rPr>
-              <a:t>K2 · SDG RELEVANCE</a:t>
+              <a:t>SDG RELEVANCE</a:t>
             </a:r>
             <a:endParaRPr lang="en-US" sz="1000" dirty="0"/>
           </a:p>
@@ -6206,7 +6138,7 @@
           </a:prstGeom>
           <a:extLst>
             <a:ext uri="{C572A759-6A51-4108-AA02-DFA0A04FC94B}">
-              <ma14:wrappingTextBoxFlag xmlns:ma14="http://schemas.microsoft.com/office/mac/drawingml/2011/main" xmlns="" val="0"/>
+              <ma14:wrappingTextBoxFlag xmlns="" xmlns:ma14="http://schemas.microsoft.com/office/mac/drawingml/2011/main" val="0"/>
             </a:ext>
           </a:extLst>
         </p:spPr>
@@ -6480,7 +6412,7 @@
               <a:buNone/>
             </a:pPr>
             <a:r>
-              <a:rPr lang="en-US" sz="1000" b="1" kern="0" spc="150" dirty="0">
+              <a:rPr lang="en-US" sz="1000" b="1" kern="0" spc="150">
                 <a:solidFill>
                   <a:schemeClr val="accent1"/>
                 </a:solidFill>
@@ -6488,7 +6420,7 @@
                 <a:ea typeface="Arial" pitchFamily="34" charset="-122"/>
                 <a:cs typeface="Arial" pitchFamily="34" charset="-120"/>
               </a:rPr>
-              <a:t>RUBRIC 2 · USER GROUP</a:t>
+              <a:t>USER GROUP</a:t>
             </a:r>
             <a:endParaRPr lang="en-US" sz="1000" dirty="0"/>
           </a:p>
@@ -7369,7 +7301,7 @@
           </a:prstGeom>
           <a:extLst>
             <a:ext uri="{C572A759-6A51-4108-AA02-DFA0A04FC94B}">
-              <ma14:wrappingTextBoxFlag xmlns="" xmlns:ma14="http://schemas.microsoft.com/office/mac/drawingml/2011/main" val="0"/>
+              <ma14:wrappingTextBoxFlag xmlns:ma14="http://schemas.microsoft.com/office/mac/drawingml/2011/main" xmlns="" val="0"/>
             </a:ext>
           </a:extLst>
         </p:spPr>
@@ -7448,7 +7380,7 @@
               <a:buNone/>
             </a:pPr>
             <a:r>
-              <a:rPr lang="en-US" sz="1000" b="1" kern="0" spc="150" dirty="0">
+              <a:rPr lang="en-US" sz="1000" b="1" kern="0" spc="150">
                 <a:solidFill>
                   <a:schemeClr val="accent1"/>
                 </a:solidFill>
@@ -7456,7 +7388,7 @@
                 <a:ea typeface="Arial" pitchFamily="34" charset="-122"/>
                 <a:cs typeface="Arial" pitchFamily="34" charset="-120"/>
               </a:rPr>
-              <a:t>RUBRIC 3 · SOLUTION DESCRIPTION     K1 · AI TOOL</a:t>
+              <a:t>SOLUTION</a:t>
             </a:r>
             <a:endParaRPr lang="en-US" sz="1000" dirty="0"/>
           </a:p>
@@ -9023,7 +8955,7 @@
           </a:prstGeom>
           <a:extLst>
             <a:ext uri="{C572A759-6A51-4108-AA02-DFA0A04FC94B}">
-              <ma14:wrappingTextBoxFlag xmlns="" xmlns:ma14="http://schemas.microsoft.com/office/mac/drawingml/2011/main" val="0"/>
+              <ma14:wrappingTextBoxFlag xmlns:ma14="http://schemas.microsoft.com/office/mac/drawingml/2011/main" xmlns="" val="0"/>
             </a:ext>
           </a:extLst>
         </p:spPr>
@@ -9102,7 +9034,7 @@
               <a:buNone/>
             </a:pPr>
             <a:r>
-              <a:rPr lang="en-US" sz="1000" b="1" kern="0" spc="150" dirty="0">
+              <a:rPr lang="en-US" sz="1000" b="1" kern="0" spc="150">
                 <a:solidFill>
                   <a:schemeClr val="accent1"/>
                 </a:solidFill>
@@ -9110,7 +9042,7 @@
                 <a:ea typeface="Arial" pitchFamily="34" charset="-122"/>
                 <a:cs typeface="Arial" pitchFamily="34" charset="-120"/>
               </a:rPr>
-              <a:t>RUBRIC 3 · SOLUTION DESCRIPTION     RUBRIC 5 · WORKING PROTOTYPE</a:t>
+              <a:t>MODEL COMPARISON</a:t>
             </a:r>
             <a:endParaRPr lang="en-US" sz="1000" dirty="0"/>
           </a:p>
@@ -11656,7 +11588,7 @@
           </a:prstGeom>
           <a:extLst>
             <a:ext uri="{C572A759-6A51-4108-AA02-DFA0A04FC94B}">
-              <ma14:wrappingTextBoxFlag xmlns="" xmlns:ma14="http://schemas.microsoft.com/office/mac/drawingml/2011/main" val="0"/>
+              <ma14:wrappingTextBoxFlag xmlns:ma14="http://schemas.microsoft.com/office/mac/drawingml/2011/main" xmlns="" val="0"/>
             </a:ext>
           </a:extLst>
         </p:spPr>
@@ -11735,7 +11667,7 @@
               <a:buNone/>
             </a:pPr>
             <a:r>
-              <a:rPr lang="en-US" sz="1000" b="1" kern="0" spc="150" dirty="0">
+              <a:rPr lang="en-US" sz="1000" b="1" kern="0" spc="150">
                 <a:solidFill>
                   <a:schemeClr val="accent1"/>
                 </a:solidFill>
@@ -11743,7 +11675,7 @@
                 <a:ea typeface="Arial" pitchFamily="34" charset="-122"/>
                 <a:cs typeface="Arial" pitchFamily="34" charset="-120"/>
               </a:rPr>
-              <a:t>RUBRIC 5 · WORKING PROTOTYPE     RUBRIC 6 · ETHICAL REASONING</a:t>
+              <a:t>MODEL ERRORS</a:t>
             </a:r>
             <a:endParaRPr lang="en-US" sz="1000" dirty="0"/>
           </a:p>
@@ -12622,7 +12554,7 @@
           </a:prstGeom>
           <a:extLst>
             <a:ext uri="{C572A759-6A51-4108-AA02-DFA0A04FC94B}">
-              <ma14:wrappingTextBoxFlag xmlns="" xmlns:ma14="http://schemas.microsoft.com/office/mac/drawingml/2011/main" val="0"/>
+              <ma14:wrappingTextBoxFlag xmlns:ma14="http://schemas.microsoft.com/office/mac/drawingml/2011/main" xmlns="" val="0"/>
             </a:ext>
           </a:extLst>
         </p:spPr>
@@ -12709,7 +12641,7 @@
                 <a:ea typeface="Arial" pitchFamily="34" charset="-122"/>
                 <a:cs typeface="Arial" pitchFamily="34" charset="-120"/>
               </a:rPr>
-              <a:t>RUBRIC 5 · WORKING PROTOTYPE</a:t>
+              <a:t>WORKING PROTOTYPE</a:t>
             </a:r>
             <a:endParaRPr lang="en-US" sz="1000" dirty="0"/>
           </a:p>
@@ -13169,7 +13101,7 @@
           </a:prstGeom>
           <a:extLst>
             <a:ext uri="{C572A759-6A51-4108-AA02-DFA0A04FC94B}">
-              <ma14:wrappingTextBoxFlag xmlns:ma14="http://schemas.microsoft.com/office/mac/drawingml/2011/main" xmlns="" val="0"/>
+              <ma14:wrappingTextBoxFlag xmlns="" xmlns:ma14="http://schemas.microsoft.com/office/mac/drawingml/2011/main" val="0"/>
             </a:ext>
           </a:extLst>
         </p:spPr>
@@ -13253,7 +13185,7 @@
               <a:buNone/>
             </a:pPr>
             <a:r>
-              <a:rPr lang="en-US" sz="1000" b="1" kern="0" spc="150" dirty="0">
+              <a:rPr lang="en-US" sz="1000" b="1" kern="0" spc="150">
                 <a:solidFill>
                   <a:schemeClr val="accent1"/>
                 </a:solidFill>
@@ -13261,7 +13193,7 @@
                 <a:ea typeface="Arial" pitchFamily="34" charset="-122"/>
                 <a:cs typeface="Arial" pitchFamily="34" charset="-120"/>
               </a:rPr>
-              <a:t>RUBRIC 4 · PROBLEM-SOLUTION FIT</a:t>
+              <a:t>PROBLEM-SOLUTION FIT</a:t>
             </a:r>
             <a:endParaRPr lang="en-US" sz="1000" dirty="0"/>
           </a:p>
@@ -14259,7 +14191,7 @@
           </a:prstGeom>
           <a:extLst>
             <a:ext uri="{C572A759-6A51-4108-AA02-DFA0A04FC94B}">
-              <ma14:wrappingTextBoxFlag xmlns="" xmlns:ma14="http://schemas.microsoft.com/office/mac/drawingml/2011/main" val="0"/>
+              <ma14:wrappingTextBoxFlag xmlns:ma14="http://schemas.microsoft.com/office/mac/drawingml/2011/main" xmlns="" val="0"/>
             </a:ext>
           </a:extLst>
         </p:spPr>

--- a/presentation/Who_needs_early_help.pptx
+++ b/presentation/Who_needs_early_help.pptx
@@ -1795,15 +1795,6 @@
           <a:p>
             <a:r>
               <a:rPr lang="en-US" dirty="0"/>
-              <a:t>Now Lucas runs one live prediction.</a:t>
-            </a:r>
-          </a:p>
-          <a:p>
-            <a:endParaRPr lang="en-US" dirty="0"/>
-          </a:p>
-          <a:p>
-            <a:r>
-              <a:rPr lang="en-US" dirty="0"/>
               <a:t>IF ASKED about men and women: recall was 0.57 and 0.70 on the test set, but 0.60 for both on more data, so that gap is chance. Gender is not a feature in the model.</a:t>
             </a:r>
           </a:p>
@@ -2517,7 +2508,7 @@
           </a:prstGeom>
           <a:extLst>
             <a:ext uri="{C572A759-6A51-4108-AA02-DFA0A04FC94B}">
-              <ma14:wrappingTextBoxFlag xmlns:ma14="http://schemas.microsoft.com/office/mac/drawingml/2011/main" xmlns="" val="0"/>
+              <ma14:wrappingTextBoxFlag xmlns="" xmlns:ma14="http://schemas.microsoft.com/office/mac/drawingml/2011/main" val="0"/>
             </a:ext>
           </a:extLst>
         </p:spPr>
@@ -2592,7 +2583,7 @@
           </a:prstGeom>
           <a:extLst>
             <a:ext uri="{C572A759-6A51-4108-AA02-DFA0A04FC94B}">
-              <ma14:wrappingTextBoxFlag xmlns:ma14="http://schemas.microsoft.com/office/mac/drawingml/2011/main" xmlns="" val="0"/>
+              <ma14:wrappingTextBoxFlag xmlns="" xmlns:ma14="http://schemas.microsoft.com/office/mac/drawingml/2011/main" val="0"/>
             </a:ext>
           </a:extLst>
         </p:spPr>
@@ -3848,7 +3839,7 @@
           </a:prstGeom>
           <a:extLst>
             <a:ext uri="{C572A759-6A51-4108-AA02-DFA0A04FC94B}">
-              <ma14:wrappingTextBoxFlag xmlns:ma14="http://schemas.microsoft.com/office/mac/drawingml/2011/main" xmlns="" val="0"/>
+              <ma14:wrappingTextBoxFlag xmlns="" xmlns:ma14="http://schemas.microsoft.com/office/mac/drawingml/2011/main" val="0"/>
             </a:ext>
           </a:extLst>
         </p:spPr>
@@ -4291,7 +4282,7 @@
           </a:prstGeom>
           <a:extLst>
             <a:ext uri="{C572A759-6A51-4108-AA02-DFA0A04FC94B}">
-              <ma14:wrappingTextBoxFlag xmlns:ma14="http://schemas.microsoft.com/office/mac/drawingml/2011/main" xmlns="" val="0"/>
+              <ma14:wrappingTextBoxFlag xmlns="" xmlns:ma14="http://schemas.microsoft.com/office/mac/drawingml/2011/main" val="0"/>
             </a:ext>
           </a:extLst>
         </p:spPr>
@@ -6138,7 +6129,7 @@
           </a:prstGeom>
           <a:extLst>
             <a:ext uri="{C572A759-6A51-4108-AA02-DFA0A04FC94B}">
-              <ma14:wrappingTextBoxFlag xmlns="" xmlns:ma14="http://schemas.microsoft.com/office/mac/drawingml/2011/main" val="0"/>
+              <ma14:wrappingTextBoxFlag xmlns:ma14="http://schemas.microsoft.com/office/mac/drawingml/2011/main" xmlns="" val="0"/>
             </a:ext>
           </a:extLst>
         </p:spPr>
@@ -7301,7 +7292,7 @@
           </a:prstGeom>
           <a:extLst>
             <a:ext uri="{C572A759-6A51-4108-AA02-DFA0A04FC94B}">
-              <ma14:wrappingTextBoxFlag xmlns:ma14="http://schemas.microsoft.com/office/mac/drawingml/2011/main" xmlns="" val="0"/>
+              <ma14:wrappingTextBoxFlag xmlns="" xmlns:ma14="http://schemas.microsoft.com/office/mac/drawingml/2011/main" val="0"/>
             </a:ext>
           </a:extLst>
         </p:spPr>
@@ -8955,7 +8946,7 @@
           </a:prstGeom>
           <a:extLst>
             <a:ext uri="{C572A759-6A51-4108-AA02-DFA0A04FC94B}">
-              <ma14:wrappingTextBoxFlag xmlns:ma14="http://schemas.microsoft.com/office/mac/drawingml/2011/main" xmlns="" val="0"/>
+              <ma14:wrappingTextBoxFlag xmlns="" xmlns:ma14="http://schemas.microsoft.com/office/mac/drawingml/2011/main" val="0"/>
             </a:ext>
           </a:extLst>
         </p:spPr>
@@ -11588,7 +11579,7 @@
           </a:prstGeom>
           <a:extLst>
             <a:ext uri="{C572A759-6A51-4108-AA02-DFA0A04FC94B}">
-              <ma14:wrappingTextBoxFlag xmlns:ma14="http://schemas.microsoft.com/office/mac/drawingml/2011/main" xmlns="" val="0"/>
+              <ma14:wrappingTextBoxFlag xmlns="" xmlns:ma14="http://schemas.microsoft.com/office/mac/drawingml/2011/main" val="0"/>
             </a:ext>
           </a:extLst>
         </p:spPr>
@@ -12554,7 +12545,7 @@
           </a:prstGeom>
           <a:extLst>
             <a:ext uri="{C572A759-6A51-4108-AA02-DFA0A04FC94B}">
-              <ma14:wrappingTextBoxFlag xmlns:ma14="http://schemas.microsoft.com/office/mac/drawingml/2011/main" xmlns="" val="0"/>
+              <ma14:wrappingTextBoxFlag xmlns="" xmlns:ma14="http://schemas.microsoft.com/office/mac/drawingml/2011/main" val="0"/>
             </a:ext>
           </a:extLst>
         </p:spPr>
@@ -13101,7 +13092,7 @@
           </a:prstGeom>
           <a:extLst>
             <a:ext uri="{C572A759-6A51-4108-AA02-DFA0A04FC94B}">
-              <ma14:wrappingTextBoxFlag xmlns="" xmlns:ma14="http://schemas.microsoft.com/office/mac/drawingml/2011/main" val="0"/>
+              <ma14:wrappingTextBoxFlag xmlns:ma14="http://schemas.microsoft.com/office/mac/drawingml/2011/main" xmlns="" val="0"/>
             </a:ext>
           </a:extLst>
         </p:spPr>
@@ -14191,7 +14182,7 @@
           </a:prstGeom>
           <a:extLst>
             <a:ext uri="{C572A759-6A51-4108-AA02-DFA0A04FC94B}">
-              <ma14:wrappingTextBoxFlag xmlns:ma14="http://schemas.microsoft.com/office/mac/drawingml/2011/main" xmlns="" val="0"/>
+              <ma14:wrappingTextBoxFlag xmlns="" xmlns:ma14="http://schemas.microsoft.com/office/mac/drawingml/2011/main" val="0"/>
             </a:ext>
           </a:extLst>
         </p:spPr>
